--- a/Projet_STM32_Presentation VF.pptx
+++ b/Projet_STM32_Presentation VF.pptx
@@ -3103,7 +3103,7 @@
         </p:nvSpPr>
         <p:spPr>
           <a:xfrm>
-            <a:off x="0" y="0"/>
+            <a:off x="0" y="341376"/>
             <a:ext cx="12191695" cy="6858000"/>
           </a:xfrm>
           <a:prstGeom prst="rect">
@@ -3253,7 +3253,7 @@
         <p:spPr>
           <a:xfrm>
             <a:off x="914400" y="1371600"/>
-            <a:ext cx="7315200" cy="1097280"/>
+            <a:ext cx="7315200" cy="867930"/>
           </a:xfrm>
           <a:prstGeom prst="rect">
             <a:avLst/>
@@ -3274,7 +3274,25 @@
                 </a:solidFill>
                 <a:latin typeface="Calibri"/>
               </a:rPr>
-              <a:t>ProjectSTM32Bousole</a:t>
+              <a:t>Project</a:t>
+            </a:r>
+            <a:r>
+              <a:rPr lang="fr-FR" sz="5400" b="1" i="0" dirty="0">
+                <a:solidFill>
+                  <a:srgbClr val="FFFFFF"/>
+                </a:solidFill>
+                <a:latin typeface="Calibri"/>
+              </a:rPr>
+              <a:t> </a:t>
+            </a:r>
+            <a:r>
+              <a:rPr sz="5400" b="1" i="0" dirty="0">
+                <a:solidFill>
+                  <a:srgbClr val="FFFFFF"/>
+                </a:solidFill>
+                <a:latin typeface="Calibri"/>
+              </a:rPr>
+              <a:t>STM32</a:t>
             </a:r>
           </a:p>
         </p:txBody>
@@ -7593,8 +7611,8 @@
         </p:nvSpPr>
         <p:spPr>
           <a:xfrm>
-            <a:off x="914400" y="1371600"/>
-            <a:ext cx="10515600" cy="1005840"/>
+            <a:off x="914400" y="1579054"/>
+            <a:ext cx="10515600" cy="590931"/>
           </a:xfrm>
           <a:prstGeom prst="rect">
             <a:avLst/>
@@ -7609,13 +7627,166 @@
           <a:p>
             <a:pPr algn="l"/>
             <a:r>
+              <a:rPr sz="1800" b="1" i="1" dirty="0">
+                <a:solidFill>
+                  <a:srgbClr val="0E2A47"/>
+                </a:solidFill>
+                <a:latin typeface="Calibri"/>
+              </a:rPr>
+              <a:t>Comment </a:t>
+            </a:r>
+            <a:r>
+              <a:rPr sz="1800" b="1" i="1" dirty="0" err="1">
+                <a:solidFill>
+                  <a:srgbClr val="0E2A47"/>
+                </a:solidFill>
+                <a:latin typeface="Calibri"/>
+              </a:rPr>
+              <a:t>fournir</a:t>
+            </a:r>
+            <a:r>
+              <a:rPr sz="1800" b="1" i="1" dirty="0">
+                <a:solidFill>
+                  <a:srgbClr val="0E2A47"/>
+                </a:solidFill>
+                <a:latin typeface="Calibri"/>
+              </a:rPr>
+              <a:t> un cap </a:t>
+            </a:r>
+            <a:r>
+              <a:rPr sz="1800" b="1" i="1" dirty="0" err="1">
+                <a:solidFill>
+                  <a:srgbClr val="0E2A47"/>
+                </a:solidFill>
+                <a:latin typeface="Calibri"/>
+              </a:rPr>
+              <a:t>fiable</a:t>
+            </a:r>
+            <a:r>
+              <a:rPr sz="1800" b="1" i="1" dirty="0">
+                <a:solidFill>
+                  <a:srgbClr val="0E2A47"/>
+                </a:solidFill>
+                <a:latin typeface="Calibri"/>
+              </a:rPr>
+              <a:t>, </a:t>
+            </a:r>
+            <a:r>
+              <a:rPr sz="1800" b="1" i="1" dirty="0" err="1">
+                <a:solidFill>
+                  <a:srgbClr val="0E2A47"/>
+                </a:solidFill>
+                <a:latin typeface="Calibri"/>
+              </a:rPr>
+              <a:t>lisible</a:t>
+            </a:r>
+            <a:r>
+              <a:rPr sz="1800" b="1" i="1" dirty="0">
+                <a:solidFill>
+                  <a:srgbClr val="0E2A47"/>
+                </a:solidFill>
+                <a:latin typeface="Calibri"/>
+              </a:rPr>
+              <a:t> et </a:t>
+            </a:r>
+            <a:r>
+              <a:rPr sz="1800" b="1" i="1" dirty="0" err="1">
+                <a:solidFill>
+                  <a:srgbClr val="0E2A47"/>
+                </a:solidFill>
+                <a:latin typeface="Calibri"/>
+              </a:rPr>
+              <a:t>réactif</a:t>
+            </a:r>
+            <a:r>
               <a:rPr sz="1800" b="1" i="1">
                 <a:solidFill>
                   <a:srgbClr val="0E2A47"/>
                 </a:solidFill>
                 <a:latin typeface="Calibri"/>
               </a:rPr>
-              <a:t>Comment fournir un cap fiable, lisible et réactif sur un Cortex-M3 à 32 MHz, sans FPU, avec des capteurs MEMS et toutes les contraintes du sujet ?</a:t>
+              <a:t> à </a:t>
+            </a:r>
+            <a:r>
+              <a:rPr sz="1800" b="1" i="1" dirty="0">
+                <a:solidFill>
+                  <a:srgbClr val="0E2A47"/>
+                </a:solidFill>
+                <a:latin typeface="Calibri"/>
+              </a:rPr>
+              <a:t>32 MHz, sans FPU, avec des </a:t>
+            </a:r>
+            <a:r>
+              <a:rPr sz="1800" b="1" i="1" dirty="0" err="1">
+                <a:solidFill>
+                  <a:srgbClr val="0E2A47"/>
+                </a:solidFill>
+                <a:latin typeface="Calibri"/>
+              </a:rPr>
+              <a:t>capteurs</a:t>
+            </a:r>
+            <a:r>
+              <a:rPr sz="1800" b="1" i="1" dirty="0">
+                <a:solidFill>
+                  <a:srgbClr val="0E2A47"/>
+                </a:solidFill>
+                <a:latin typeface="Calibri"/>
+              </a:rPr>
+              <a:t> MEMS et </a:t>
+            </a:r>
+            <a:r>
+              <a:rPr sz="1800" b="1" i="1" dirty="0" err="1">
+                <a:solidFill>
+                  <a:srgbClr val="0E2A47"/>
+                </a:solidFill>
+                <a:latin typeface="Calibri"/>
+              </a:rPr>
+              <a:t>toutes</a:t>
+            </a:r>
+            <a:r>
+              <a:rPr sz="1800" b="1" i="1" dirty="0">
+                <a:solidFill>
+                  <a:srgbClr val="0E2A47"/>
+                </a:solidFill>
+                <a:latin typeface="Calibri"/>
+              </a:rPr>
+              <a:t> les </a:t>
+            </a:r>
+            <a:r>
+              <a:rPr sz="1800" b="1" i="1" dirty="0" err="1">
+                <a:solidFill>
+                  <a:srgbClr val="0E2A47"/>
+                </a:solidFill>
+                <a:latin typeface="Calibri"/>
+              </a:rPr>
+              <a:t>contraintes</a:t>
+            </a:r>
+            <a:r>
+              <a:rPr sz="1800" b="1" i="1" dirty="0">
+                <a:solidFill>
+                  <a:srgbClr val="0E2A47"/>
+                </a:solidFill>
+                <a:latin typeface="Calibri"/>
+              </a:rPr>
+              <a:t> du </a:t>
+            </a:r>
+            <a:r>
+              <a:rPr sz="1800" b="1" i="1" dirty="0" err="1">
+                <a:solidFill>
+                  <a:srgbClr val="0E2A47"/>
+                </a:solidFill>
+                <a:latin typeface="Calibri"/>
+              </a:rPr>
+              <a:t>sujet</a:t>
+            </a:r>
+            <a:r>
+              <a:rPr sz="1800" b="1" i="1" dirty="0">
+                <a:solidFill>
+                  <a:srgbClr val="0E2A47"/>
+                </a:solidFill>
+                <a:latin typeface="Calibri"/>
+              </a:rPr>
+              <a:t> ?</a:t>
             </a:r>
           </a:p>
         </p:txBody>
